--- a/11 - NSparkAvancé - ML Tracking_Project_Model.pptx
+++ b/11 - NSparkAvancé - ML Tracking_Project_Model.pptx
@@ -225,7 +225,7 @@
           <a:p>
             <a:fld id="{6DEFCF4C-C656-4173-9B19-E1AF5C686E36}" type="datetimeFigureOut">
               <a:rPr lang="fr-FR" smtClean="0"/>
-              <a:t>20/12/2025</a:t>
+              <a:t>30/09/2026</a:t>
             </a:fld>
             <a:endParaRPr lang="fr-FR"/>
           </a:p>
@@ -799,7 +799,7 @@
           <a:p>
             <a:fld id="{1D8BD707-D9CF-40AE-B4C6-C98DA3205C09}" type="datetimeFigureOut">
               <a:rPr lang="en-US"/>
-              <a:t>12/20/2025</a:t>
+              <a:t>9/30/2026</a:t>
             </a:fld>
             <a:endParaRPr lang="en-US"/>
           </a:p>
@@ -991,7 +991,7 @@
           <a:p>
             <a:fld id="{1D8BD707-D9CF-40AE-B4C6-C98DA3205C09}" type="datetimeFigureOut">
               <a:rPr lang="en-US"/>
-              <a:t>12/20/2025</a:t>
+              <a:t>9/30/2026</a:t>
             </a:fld>
             <a:endParaRPr lang="en-US"/>
           </a:p>
@@ -1222,7 +1222,7 @@
           <a:p>
             <a:fld id="{1D8BD707-D9CF-40AE-B4C6-C98DA3205C09}" type="datetimeFigureOut">
               <a:rPr lang="en-US"/>
-              <a:t>12/20/2025</a:t>
+              <a:t>9/30/2026</a:t>
             </a:fld>
             <a:endParaRPr lang="en-US"/>
           </a:p>
@@ -1424,7 +1424,7 @@
           <a:p>
             <a:fld id="{1D8BD707-D9CF-40AE-B4C6-C98DA3205C09}" type="datetimeFigureOut">
               <a:rPr lang="en-US"/>
-              <a:t>12/20/2025</a:t>
+              <a:t>9/30/2026</a:t>
             </a:fld>
             <a:endParaRPr lang="en-US"/>
           </a:p>
@@ -1560,7 +1560,7 @@
           <a:p>
             <a:fld id="{1D8BD707-D9CF-40AE-B4C6-C98DA3205C09}" type="datetimeFigureOut">
               <a:rPr lang="en-US"/>
-              <a:t>12/20/2025</a:t>
+              <a:t>9/30/2026</a:t>
             </a:fld>
             <a:endParaRPr lang="en-US"/>
           </a:p>
@@ -1662,7 +1662,7 @@
           <a:p>
             <a:fld id="{FE69C2FC-FDFD-4827-B361-612217FFD460}" type="datetimeFigureOut">
               <a:rPr lang="fr-FR" smtClean="0"/>
-              <a:t>20/12/2025</a:t>
+              <a:t>30/09/2026</a:t>
             </a:fld>
             <a:endParaRPr lang="fr-FR"/>
           </a:p>
@@ -2174,7 +2174,7 @@
           <a:p>
             <a:fld id="{1D8BD707-D9CF-40AE-B4C6-C98DA3205C09}" type="datetimeFigureOut">
               <a:rPr lang="en-US"/>
-              <a:t>12/20/2025</a:t>
+              <a:t>9/30/2026</a:t>
             </a:fld>
             <a:endParaRPr lang="en-US"/>
           </a:p>
@@ -15101,84 +15101,119 @@
               </a:lnSpc>
             </a:pPr>
             <a:r>
-              <a:rPr lang="fr-FR" sz="1000" b="0" dirty="0">
+              <a:rPr lang="fr-FR" sz="1000" dirty="0">
                 <a:solidFill>
                   <a:srgbClr val="FFFFFF"/>
                 </a:solidFill>
-                <a:effectLst/>
-                <a:latin typeface="Consolas" panose="020B0609020204030204" pitchFamily="49" charset="0"/>
-              </a:rPr>
-              <a:t>!</a:t>
-            </a:r>
-            <a:r>
-              <a:rPr lang="fr-FR" sz="1000" b="0" dirty="0" err="1">
-                <a:solidFill>
-                  <a:srgbClr val="ABB2BF"/>
-                </a:solidFill>
-                <a:effectLst/>
+                <a:latin typeface="Consolas" panose="020B0609020204030204" pitchFamily="49" charset="0"/>
+              </a:rPr>
+              <a:t>%</a:t>
+            </a:r>
+            <a:r>
+              <a:rPr lang="fr-FR" sz="1000" dirty="0" err="1">
+                <a:solidFill>
+                  <a:srgbClr val="FFFFFF"/>
+                </a:solidFill>
                 <a:latin typeface="Consolas" panose="020B0609020204030204" pitchFamily="49" charset="0"/>
               </a:rPr>
               <a:t>pip</a:t>
             </a:r>
             <a:r>
-              <a:rPr lang="fr-FR" sz="1000" b="0" dirty="0">
-                <a:solidFill>
-                  <a:srgbClr val="ABB2BF"/>
-                </a:solidFill>
-                <a:effectLst/>
+              <a:rPr lang="fr-FR" sz="1000" dirty="0">
+                <a:solidFill>
+                  <a:srgbClr val="FFFFFF"/>
+                </a:solidFill>
                 <a:latin typeface="Consolas" panose="020B0609020204030204" pitchFamily="49" charset="0"/>
               </a:rPr>
               <a:t> </a:t>
             </a:r>
             <a:r>
-              <a:rPr lang="fr-FR" sz="1000" b="0" dirty="0" err="1">
-                <a:solidFill>
-                  <a:srgbClr val="ABB2BF"/>
-                </a:solidFill>
-                <a:effectLst/>
-                <a:latin typeface="Consolas" panose="020B0609020204030204" pitchFamily="49" charset="0"/>
-              </a:rPr>
-              <a:t>uninstall</a:t>
-            </a:r>
-            <a:r>
-              <a:rPr lang="fr-FR" sz="1000" b="0" dirty="0">
-                <a:solidFill>
-                  <a:srgbClr val="ABB2BF"/>
-                </a:solidFill>
-                <a:effectLst/>
-                <a:latin typeface="Consolas" panose="020B0609020204030204" pitchFamily="49" charset="0"/>
-              </a:rPr>
-              <a:t> </a:t>
-            </a:r>
-            <a:r>
-              <a:rPr lang="fr-FR" sz="1000" b="0" dirty="0">
-                <a:solidFill>
-                  <a:srgbClr val="56B6C2"/>
-                </a:solidFill>
-                <a:effectLst/>
-                <a:latin typeface="Consolas" panose="020B0609020204030204" pitchFamily="49" charset="0"/>
-              </a:rPr>
-              <a:t>-</a:t>
-            </a:r>
-            <a:r>
-              <a:rPr lang="fr-FR" sz="1000" b="0" dirty="0">
-                <a:solidFill>
-                  <a:srgbClr val="ABB2BF"/>
-                </a:solidFill>
-                <a:effectLst/>
-                <a:latin typeface="Consolas" panose="020B0609020204030204" pitchFamily="49" charset="0"/>
-              </a:rPr>
-              <a:t>y </a:t>
-            </a:r>
-            <a:r>
-              <a:rPr lang="fr-FR" sz="1000" b="0" dirty="0" err="1">
-                <a:solidFill>
-                  <a:srgbClr val="ABB2BF"/>
-                </a:solidFill>
-                <a:effectLst/>
+              <a:rPr lang="fr-FR" sz="1000" dirty="0" err="1">
+                <a:solidFill>
+                  <a:srgbClr val="FFFFFF"/>
+                </a:solidFill>
+                <a:latin typeface="Consolas" panose="020B0609020204030204" pitchFamily="49" charset="0"/>
+              </a:rPr>
+              <a:t>install</a:t>
+            </a:r>
+            <a:r>
+              <a:rPr lang="fr-FR" sz="1000" dirty="0">
+                <a:solidFill>
+                  <a:srgbClr val="FFFFFF"/>
+                </a:solidFill>
+                <a:latin typeface="Consolas" panose="020B0609020204030204" pitchFamily="49" charset="0"/>
+              </a:rPr>
+              <a:t> "py4j==0.10.9.7" "</a:t>
+            </a:r>
+            <a:r>
+              <a:rPr lang="fr-FR" sz="1000" dirty="0" err="1">
+                <a:solidFill>
+                  <a:srgbClr val="FFFFFF"/>
+                </a:solidFill>
                 <a:latin typeface="Consolas" panose="020B0609020204030204" pitchFamily="49" charset="0"/>
               </a:rPr>
               <a:t>pyOpenSSL</a:t>
+            </a:r>
+            <a:r>
+              <a:rPr lang="fr-FR" sz="1000" dirty="0">
+                <a:solidFill>
+                  <a:srgbClr val="FFFFFF"/>
+                </a:solidFill>
+                <a:latin typeface="Consolas" panose="020B0609020204030204" pitchFamily="49" charset="0"/>
+              </a:rPr>
+              <a:t>==25.3.0" "</a:t>
+            </a:r>
+            <a:r>
+              <a:rPr lang="fr-FR" sz="1000" dirty="0" err="1">
+                <a:solidFill>
+                  <a:srgbClr val="FFFFFF"/>
+                </a:solidFill>
+                <a:latin typeface="Consolas" panose="020B0609020204030204" pitchFamily="49" charset="0"/>
+              </a:rPr>
+              <a:t>cryptography</a:t>
+            </a:r>
+            <a:r>
+              <a:rPr lang="fr-FR" sz="1000" dirty="0">
+                <a:solidFill>
+                  <a:srgbClr val="FFFFFF"/>
+                </a:solidFill>
+                <a:latin typeface="Consolas" panose="020B0609020204030204" pitchFamily="49" charset="0"/>
+              </a:rPr>
+              <a:t>&gt;=43,&lt;47"</a:t>
+            </a:r>
+          </a:p>
+          <a:p>
+            <a:pPr>
+              <a:lnSpc>
+                <a:spcPts val="1425"/>
+              </a:lnSpc>
+            </a:pPr>
+            <a:r>
+              <a:rPr lang="fr-FR" sz="1000" dirty="0">
+                <a:solidFill>
+                  <a:srgbClr val="FFFFFF"/>
+                </a:solidFill>
+                <a:latin typeface="Consolas" panose="020B0609020204030204" pitchFamily="49" charset="0"/>
+              </a:rPr>
+              <a:t>%</a:t>
+            </a:r>
+            <a:r>
+              <a:rPr lang="fr-FR" sz="1000" dirty="0" err="1">
+                <a:solidFill>
+                  <a:srgbClr val="FFFFFF"/>
+                </a:solidFill>
+                <a:latin typeface="Consolas" panose="020B0609020204030204" pitchFamily="49" charset="0"/>
+              </a:rPr>
+              <a:t>pip</a:t>
+            </a:r>
+            <a:r>
+              <a:rPr lang="fr-FR" sz="1000">
+                <a:solidFill>
+                  <a:srgbClr val="FFFFFF"/>
+                </a:solidFill>
+                <a:latin typeface="Consolas" panose="020B0609020204030204" pitchFamily="49" charset="0"/>
+              </a:rPr>
+              <a:t> check</a:t>
             </a:r>
             <a:endParaRPr lang="fr-FR" sz="1000" b="0" dirty="0">
               <a:solidFill>
@@ -15187,157 +15222,6 @@
               <a:effectLst/>
               <a:latin typeface="Consolas" panose="020B0609020204030204" pitchFamily="49" charset="0"/>
             </a:endParaRPr>
-          </a:p>
-          <a:p>
-            <a:pPr>
-              <a:lnSpc>
-                <a:spcPts val="1425"/>
-              </a:lnSpc>
-            </a:pPr>
-            <a:r>
-              <a:rPr lang="fr-FR" sz="1000" b="0" dirty="0">
-                <a:solidFill>
-                  <a:srgbClr val="FFFFFF"/>
-                </a:solidFill>
-                <a:effectLst/>
-                <a:latin typeface="Consolas" panose="020B0609020204030204" pitchFamily="49" charset="0"/>
-              </a:rPr>
-              <a:t>!</a:t>
-            </a:r>
-            <a:r>
-              <a:rPr lang="fr-FR" sz="1000" b="0" dirty="0" err="1">
-                <a:solidFill>
-                  <a:srgbClr val="ABB2BF"/>
-                </a:solidFill>
-                <a:effectLst/>
-                <a:latin typeface="Consolas" panose="020B0609020204030204" pitchFamily="49" charset="0"/>
-              </a:rPr>
-              <a:t>pip</a:t>
-            </a:r>
-            <a:r>
-              <a:rPr lang="fr-FR" sz="1000" b="0" dirty="0">
-                <a:solidFill>
-                  <a:srgbClr val="ABB2BF"/>
-                </a:solidFill>
-                <a:effectLst/>
-                <a:latin typeface="Consolas" panose="020B0609020204030204" pitchFamily="49" charset="0"/>
-              </a:rPr>
-              <a:t> </a:t>
-            </a:r>
-            <a:r>
-              <a:rPr lang="fr-FR" sz="1000" b="0" dirty="0" err="1">
-                <a:solidFill>
-                  <a:srgbClr val="ABB2BF"/>
-                </a:solidFill>
-                <a:effectLst/>
-                <a:latin typeface="Consolas" panose="020B0609020204030204" pitchFamily="49" charset="0"/>
-              </a:rPr>
-              <a:t>install</a:t>
-            </a:r>
-            <a:r>
-              <a:rPr lang="fr-FR" sz="1000" b="0" dirty="0">
-                <a:solidFill>
-                  <a:srgbClr val="ABB2BF"/>
-                </a:solidFill>
-                <a:effectLst/>
-                <a:latin typeface="Consolas" panose="020B0609020204030204" pitchFamily="49" charset="0"/>
-              </a:rPr>
-              <a:t> </a:t>
-            </a:r>
-            <a:r>
-              <a:rPr lang="fr-FR" sz="1000" b="0" dirty="0">
-                <a:solidFill>
-                  <a:srgbClr val="56B6C2"/>
-                </a:solidFill>
-                <a:effectLst/>
-                <a:latin typeface="Consolas" panose="020B0609020204030204" pitchFamily="49" charset="0"/>
-              </a:rPr>
-              <a:t>-</a:t>
-            </a:r>
-            <a:r>
-              <a:rPr lang="fr-FR" sz="1000" b="0" dirty="0">
-                <a:solidFill>
-                  <a:srgbClr val="ABB2BF"/>
-                </a:solidFill>
-                <a:effectLst/>
-                <a:latin typeface="Consolas" panose="020B0609020204030204" pitchFamily="49" charset="0"/>
-              </a:rPr>
-              <a:t>U </a:t>
-            </a:r>
-            <a:r>
-              <a:rPr lang="fr-FR" sz="1000" b="0" dirty="0">
-                <a:solidFill>
-                  <a:srgbClr val="98C379"/>
-                </a:solidFill>
-                <a:effectLst/>
-                <a:latin typeface="Consolas" panose="020B0609020204030204" pitchFamily="49" charset="0"/>
-              </a:rPr>
-              <a:t>"</a:t>
-            </a:r>
-            <a:r>
-              <a:rPr lang="fr-FR" sz="1000" b="0" dirty="0" err="1">
-                <a:solidFill>
-                  <a:srgbClr val="98C379"/>
-                </a:solidFill>
-                <a:effectLst/>
-                <a:latin typeface="Consolas" panose="020B0609020204030204" pitchFamily="49" charset="0"/>
-              </a:rPr>
-              <a:t>cryptography</a:t>
-            </a:r>
-            <a:r>
-              <a:rPr lang="fr-FR" sz="1000" b="0" dirty="0">
-                <a:solidFill>
-                  <a:srgbClr val="98C379"/>
-                </a:solidFill>
-                <a:effectLst/>
-                <a:latin typeface="Consolas" panose="020B0609020204030204" pitchFamily="49" charset="0"/>
-              </a:rPr>
-              <a:t>&gt;=43,&lt;47"</a:t>
-            </a:r>
-            <a:endParaRPr lang="fr-FR" sz="1000" b="0" dirty="0">
-              <a:solidFill>
-                <a:srgbClr val="ABB2BF"/>
-              </a:solidFill>
-              <a:effectLst/>
-              <a:latin typeface="Consolas" panose="020B0609020204030204" pitchFamily="49" charset="0"/>
-            </a:endParaRPr>
-          </a:p>
-          <a:p>
-            <a:pPr>
-              <a:lnSpc>
-                <a:spcPts val="1425"/>
-              </a:lnSpc>
-            </a:pPr>
-            <a:r>
-              <a:rPr lang="fr-FR" sz="1000" b="0" dirty="0">
-                <a:solidFill>
-                  <a:srgbClr val="FFFFFF"/>
-                </a:solidFill>
-                <a:effectLst/>
-                <a:latin typeface="Consolas" panose="020B0609020204030204" pitchFamily="49" charset="0"/>
-              </a:rPr>
-              <a:t>!</a:t>
-            </a:r>
-            <a:r>
-              <a:rPr lang="fr-FR" sz="1000" b="0" dirty="0" err="1">
-                <a:solidFill>
-                  <a:srgbClr val="ABB2BF"/>
-                </a:solidFill>
-                <a:effectLst/>
-                <a:latin typeface="Consolas" panose="020B0609020204030204" pitchFamily="49" charset="0"/>
-              </a:rPr>
-              <a:t>pip</a:t>
-            </a:r>
-            <a:r>
-              <a:rPr lang="fr-FR" sz="1000" b="0" dirty="0">
-                <a:solidFill>
-                  <a:srgbClr val="ABB2BF"/>
-                </a:solidFill>
-                <a:effectLst/>
-                <a:latin typeface="Consolas" panose="020B0609020204030204" pitchFamily="49" charset="0"/>
-              </a:rPr>
-              <a:t> check</a:t>
-            </a:r>
           </a:p>
         </p:txBody>
       </p:sp>
@@ -23925,6 +23809,15 @@
 </file>
 
 <file path=customXml/item1.xml><?xml version="1.0" encoding="utf-8"?>
+<?mso-contentType ?>
+<FormTemplates xmlns="http://schemas.microsoft.com/sharepoint/v3/contenttype/forms">
+  <Display>DocumentLibraryForm</Display>
+  <Edit>DocumentLibraryForm</Edit>
+  <New>DocumentLibraryForm</New>
+</FormTemplates>
+</file>
+
+<file path=customXml/item2.xml><?xml version="1.0" encoding="utf-8"?>
 <ct:contentTypeSchema xmlns:ct="http://schemas.microsoft.com/office/2006/metadata/contentType" xmlns:ma="http://schemas.microsoft.com/office/2006/metadata/properties/metaAttributes" ct:_="" ma:_="" ma:contentTypeName="Document" ma:contentTypeID="0x01010058419B1710D3DF4A9DAA9ADF73C802B5" ma:contentTypeVersion="14" ma:contentTypeDescription="Crée un document." ma:contentTypeScope="" ma:versionID="d45f398bd182fafaec1e6b20d8a38b6f">
   <xsd:schema xmlns:xsd="http://www.w3.org/2001/XMLSchema" xmlns:xs="http://www.w3.org/2001/XMLSchema" xmlns:p="http://schemas.microsoft.com/office/2006/metadata/properties" xmlns:ns3="6f1b3788-58c0-46a5-9604-64d97c7fc47c" xmlns:ns4="73eca01c-4ea5-40c8-83fd-b296bd340025" targetNamespace="http://schemas.microsoft.com/office/2006/metadata/properties" ma:root="true" ma:fieldsID="de746a5257d740f042749d495693305b" ns3:_="" ns4:_="">
     <xsd:import namespace="6f1b3788-58c0-46a5-9604-64d97c7fc47c"/>
@@ -24149,15 +24042,6 @@
 </ct:contentTypeSchema>
 </file>
 
-<file path=customXml/item2.xml><?xml version="1.0" encoding="utf-8"?>
-<?mso-contentType ?>
-<FormTemplates xmlns="http://schemas.microsoft.com/sharepoint/v3/contenttype/forms">
-  <Display>DocumentLibraryForm</Display>
-  <Edit>DocumentLibraryForm</Edit>
-  <New>DocumentLibraryForm</New>
-</FormTemplates>
-</file>
-
 <file path=customXml/item3.xml><?xml version="1.0" encoding="utf-8"?>
 <p:properties xmlns:p="http://schemas.microsoft.com/office/2006/metadata/properties" xmlns:xsi="http://www.w3.org/2001/XMLSchema-instance" xmlns:pc="http://schemas.microsoft.com/office/infopath/2007/PartnerControls">
   <documentManagement>
@@ -24174,6 +24058,14 @@
 </file>
 
 <file path=customXml/itemProps1.xml><?xml version="1.0" encoding="utf-8"?>
+<ds:datastoreItem xmlns:ds="http://schemas.openxmlformats.org/officeDocument/2006/customXml" ds:itemID="{EBAA46D8-DF31-4768-AD82-8F485C82E644}">
+  <ds:schemaRefs>
+    <ds:schemaRef ds:uri="http://schemas.microsoft.com/sharepoint/v3/contenttype/forms"/>
+  </ds:schemaRefs>
+</ds:datastoreItem>
+</file>
+
+<file path=customXml/itemProps2.xml><?xml version="1.0" encoding="utf-8"?>
 <ds:datastoreItem xmlns:ds="http://schemas.openxmlformats.org/officeDocument/2006/customXml" ds:itemID="{13D40C7A-64C6-4B3B-A1B6-9CB64BC75662}">
   <ds:schemaRefs>
     <ds:schemaRef ds:uri="http://schemas.microsoft.com/office/2006/metadata/contentType"/>
@@ -24188,14 +24080,6 @@
     <ds:schemaRef ds:uri="http://purl.org/dc/elements/1.1/"/>
     <ds:schemaRef ds:uri="http://purl.org/dc/terms/"/>
     <ds:schemaRef ds:uri="http://schemas.microsoft.com/internal/obd"/>
-  </ds:schemaRefs>
-</ds:datastoreItem>
-</file>
-
-<file path=customXml/itemProps2.xml><?xml version="1.0" encoding="utf-8"?>
-<ds:datastoreItem xmlns:ds="http://schemas.openxmlformats.org/officeDocument/2006/customXml" ds:itemID="{EBAA46D8-DF31-4768-AD82-8F485C82E644}">
-  <ds:schemaRefs>
-    <ds:schemaRef ds:uri="http://schemas.microsoft.com/sharepoint/v3/contenttype/forms"/>
   </ds:schemaRefs>
 </ds:datastoreItem>
 </file>
